--- a/PPT_Training/Hari_3_Testing_Performance_Release_Android.pptx
+++ b/PPT_Training/Hari_3_Testing_Performance_Release_Android.pptx
@@ -1110,25 +1110,25 @@
           <a:p/>
           <a:p>
             <a:r>
-              <a:t>TUJUAN: Mencegah contract drift.</a:t>
+              <a:t>TUJUAN: Mencegah regression pada ApiClient.</a:t>
             </a:r>
           </a:p>
           <a:p/>
           <a:p>
             <a:r>
-              <a:t>ARAHAN TRAINER: Bandingkan payload nyata dengan example Swagger. CI penuh adalah pengayaan.</a:t>
+              <a:t>ARAHAN TRAINER: Gunakan JSON fixture dan MockClient agar test cepat serta deterministik.</a:t>
             </a:r>
           </a:p>
           <a:p/>
           <a:p>
             <a:r>
-              <a:t>PERTANYAAN DISKUSI: Apa breaking change yang paling mudah lolos manual testing?</a:t>
+              <a:t>PERTANYAAN DISKUSI: Breaking response apa yang harus membuat test gagal?</a:t>
             </a:r>
           </a:p>
           <a:p/>
           <a:p>
             <a:r>
-              <a:t>RUJUKAN: OpenAPI handoff dan module Hari 2/3.</a:t>
+              <a:t>RUJUKAN: Modul Hari 2/3 dan package:http testing.</a:t>
             </a:r>
           </a:p>
         </p:txBody>
@@ -13026,7 +13026,7 @@
                 </a:solidFill>
                 <a:latin typeface="Aptos Display"/>
               </a:rPr>
-              <a:t>Contract test menjaga Flutter ↔ OpenAPI</a:t>
+              <a:t>API client test menjaga mapping Flutter</a:t>
             </a:r>
           </a:p>
         </p:txBody>
@@ -13225,7 +13225,7 @@
                 </a:solidFill>
                 <a:latin typeface="Aptos"/>
               </a:rPr>
-              <a:t>OpenAPI example</a:t>
+              <a:t>JSON fixture</a:t>
             </a:r>
           </a:p>
         </p:txBody>
@@ -13307,7 +13307,7 @@
                 </a:solidFill>
                 <a:latin typeface="Aptos"/>
               </a:rPr>
-              <a:t>expected schema</a:t>
+              <a:t>known payload</a:t>
             </a:r>
           </a:p>
         </p:txBody>
@@ -13389,7 +13389,7 @@
                 </a:solidFill>
                 <a:latin typeface="Aptos"/>
               </a:rPr>
-              <a:t>HTTP response</a:t>
+              <a:t>MockClient</a:t>
             </a:r>
           </a:p>
         </p:txBody>
@@ -13471,7 +13471,7 @@
                 </a:solidFill>
                 <a:latin typeface="Aptos"/>
               </a:rPr>
-              <a:t>hosted/mock</a:t>
+              <a:t>status/headers</a:t>
             </a:r>
           </a:p>
         </p:txBody>
@@ -14234,7 +14234,7 @@
                 </a:solidFill>
                 <a:latin typeface="Aptos"/>
               </a:rPr>
-              <a:t>CI</a:t>
+              <a:t>T</a:t>
             </a:r>
           </a:p>
         </p:txBody>
@@ -14273,7 +14273,7 @@
                 </a:solidFill>
                 <a:latin typeface="Aptos"/>
               </a:rPr>
-              <a:t>CI evolution</a:t>
+              <a:t>Test cases</a:t>
             </a:r>
           </a:p>
         </p:txBody>
@@ -14315,7 +14315,7 @@
               <a:rPr>
                 <a:latin typeface="Aptos"/>
               </a:rPr>
-              <a:t>•  Export openapi.json</a:t>
+              <a:t>•  200 parse success</a:t>
             </a:r>
           </a:p>
           <a:p>
@@ -14334,7 +14334,7 @@
               <a:rPr>
                 <a:latin typeface="Aptos"/>
               </a:rPr>
-              <a:t>•  Validate examples/schema</a:t>
+              <a:t>•  401 typed failure</a:t>
             </a:r>
           </a:p>
           <a:p>
@@ -14353,7 +14353,7 @@
               <a:rPr>
                 <a:latin typeface="Aptos"/>
               </a:rPr>
-              <a:t>•  Run against Docker image</a:t>
+              <a:t>•  422 field mapping</a:t>
             </a:r>
           </a:p>
           <a:p>
@@ -14372,7 +14372,7 @@
               <a:rPr>
                 <a:latin typeface="Aptos"/>
               </a:rPr>
-              <a:t>•  Fail on breaking change</a:t>
+              <a:t>•  invalid JSON rejected</a:t>
             </a:r>
           </a:p>
         </p:txBody>
@@ -41731,7 +41731,7 @@
                         </a:defRPr>
                       </a:pPr>
                       <a:r>
-                        <a:t>Contract</a:t>
+                        <a:t>API client</a:t>
                       </a:r>
                     </a:p>
                   </a:txBody>
@@ -41755,7 +41755,7 @@
                         </a:defRPr>
                       </a:pPr>
                       <a:r>
-                        <a:t>OpenAPI parity</a:t>
+                        <a:t>schema/status mapping</a:t>
                       </a:r>
                     </a:p>
                   </a:txBody>
@@ -41779,7 +41779,7 @@
                         </a:defRPr>
                       </a:pPr>
                       <a:r>
-                        <a:t>schema/status evidence</a:t>
+                        <a:t>test evidence</a:t>
                       </a:r>
                     </a:p>
                   </a:txBody>
@@ -47656,7 +47656,7 @@
                 </a:solidFill>
                 <a:latin typeface="Aptos"/>
               </a:rPr>
-              <a:t>Contract</a:t>
+              <a:t>API integration</a:t>
             </a:r>
           </a:p>
         </p:txBody>
@@ -47698,7 +47698,7 @@
               <a:rPr>
                 <a:latin typeface="Aptos"/>
               </a:rPr>
-              <a:t>•  Swagger/schema stabil</a:t>
+              <a:t>•  Model/schema stabil</a:t>
             </a:r>
           </a:p>
           <a:p>
@@ -47736,7 +47736,7 @@
               <a:rPr>
                 <a:latin typeface="Aptos"/>
               </a:rPr>
-              <a:t>•  Hosted + mock parity</a:t>
+              <a:t>•  ApiClient dapat diuji</a:t>
             </a:r>
           </a:p>
         </p:txBody>
